--- a/mcp/paper/fig/prompt.pptx
+++ b/mcp/paper/fig/prompt.pptx
@@ -198,7 +198,7 @@
           <a:p>
             <a:fld id="{2A4973AF-1E6D-4746-8FA3-3206D360D595}" type="datetimeFigureOut">
               <a:rPr lang="en-CN" smtClean="0"/>
-              <a:t>2026/2/19</a:t>
+              <a:t>2026/2/20</a:t>
             </a:fld>
             <a:endParaRPr lang="en-CN"/>
           </a:p>
@@ -726,7 +726,7 @@
           <a:p>
             <a:fld id="{F89A057A-0BEA-48B2-A216-D46DB2C83327}" type="datetimeFigureOut">
               <a:rPr lang="zh-CN" altLang="en-US" smtClean="0"/>
-              <a:t>2026/2/19</a:t>
+              <a:t>2026/2/20</a:t>
             </a:fld>
             <a:endParaRPr lang="zh-CN" altLang="en-US"/>
           </a:p>
@@ -896,7 +896,7 @@
           <a:p>
             <a:fld id="{F89A057A-0BEA-48B2-A216-D46DB2C83327}" type="datetimeFigureOut">
               <a:rPr lang="zh-CN" altLang="en-US" smtClean="0"/>
-              <a:t>2026/2/19</a:t>
+              <a:t>2026/2/20</a:t>
             </a:fld>
             <a:endParaRPr lang="zh-CN" altLang="en-US"/>
           </a:p>
@@ -1076,7 +1076,7 @@
           <a:p>
             <a:fld id="{F89A057A-0BEA-48B2-A216-D46DB2C83327}" type="datetimeFigureOut">
               <a:rPr lang="zh-CN" altLang="en-US" smtClean="0"/>
-              <a:t>2026/2/19</a:t>
+              <a:t>2026/2/20</a:t>
             </a:fld>
             <a:endParaRPr lang="zh-CN" altLang="en-US"/>
           </a:p>
@@ -1246,7 +1246,7 @@
           <a:p>
             <a:fld id="{F89A057A-0BEA-48B2-A216-D46DB2C83327}" type="datetimeFigureOut">
               <a:rPr lang="zh-CN" altLang="en-US" smtClean="0"/>
-              <a:t>2026/2/19</a:t>
+              <a:t>2026/2/20</a:t>
             </a:fld>
             <a:endParaRPr lang="zh-CN" altLang="en-US"/>
           </a:p>
@@ -1490,7 +1490,7 @@
           <a:p>
             <a:fld id="{F89A057A-0BEA-48B2-A216-D46DB2C83327}" type="datetimeFigureOut">
               <a:rPr lang="zh-CN" altLang="en-US" smtClean="0"/>
-              <a:t>2026/2/19</a:t>
+              <a:t>2026/2/20</a:t>
             </a:fld>
             <a:endParaRPr lang="zh-CN" altLang="en-US"/>
           </a:p>
@@ -1722,7 +1722,7 @@
           <a:p>
             <a:fld id="{F89A057A-0BEA-48B2-A216-D46DB2C83327}" type="datetimeFigureOut">
               <a:rPr lang="zh-CN" altLang="en-US" smtClean="0"/>
-              <a:t>2026/2/19</a:t>
+              <a:t>2026/2/20</a:t>
             </a:fld>
             <a:endParaRPr lang="zh-CN" altLang="en-US"/>
           </a:p>
@@ -2089,7 +2089,7 @@
           <a:p>
             <a:fld id="{F89A057A-0BEA-48B2-A216-D46DB2C83327}" type="datetimeFigureOut">
               <a:rPr lang="zh-CN" altLang="en-US" smtClean="0"/>
-              <a:t>2026/2/19</a:t>
+              <a:t>2026/2/20</a:t>
             </a:fld>
             <a:endParaRPr lang="zh-CN" altLang="en-US"/>
           </a:p>
@@ -2207,7 +2207,7 @@
           <a:p>
             <a:fld id="{F89A057A-0BEA-48B2-A216-D46DB2C83327}" type="datetimeFigureOut">
               <a:rPr lang="zh-CN" altLang="en-US" smtClean="0"/>
-              <a:t>2026/2/19</a:t>
+              <a:t>2026/2/20</a:t>
             </a:fld>
             <a:endParaRPr lang="zh-CN" altLang="en-US"/>
           </a:p>
@@ -2302,7 +2302,7 @@
           <a:p>
             <a:fld id="{F89A057A-0BEA-48B2-A216-D46DB2C83327}" type="datetimeFigureOut">
               <a:rPr lang="zh-CN" altLang="en-US" smtClean="0"/>
-              <a:t>2026/2/19</a:t>
+              <a:t>2026/2/20</a:t>
             </a:fld>
             <a:endParaRPr lang="zh-CN" altLang="en-US"/>
           </a:p>
@@ -2579,7 +2579,7 @@
           <a:p>
             <a:fld id="{F89A057A-0BEA-48B2-A216-D46DB2C83327}" type="datetimeFigureOut">
               <a:rPr lang="zh-CN" altLang="en-US" smtClean="0"/>
-              <a:t>2026/2/19</a:t>
+              <a:t>2026/2/20</a:t>
             </a:fld>
             <a:endParaRPr lang="zh-CN" altLang="en-US"/>
           </a:p>
@@ -2836,7 +2836,7 @@
           <a:p>
             <a:fld id="{F89A057A-0BEA-48B2-A216-D46DB2C83327}" type="datetimeFigureOut">
               <a:rPr lang="zh-CN" altLang="en-US" smtClean="0"/>
-              <a:t>2026/2/19</a:t>
+              <a:t>2026/2/20</a:t>
             </a:fld>
             <a:endParaRPr lang="zh-CN" altLang="en-US"/>
           </a:p>
@@ -3049,7 +3049,7 @@
           <a:p>
             <a:fld id="{F89A057A-0BEA-48B2-A216-D46DB2C83327}" type="datetimeFigureOut">
               <a:rPr lang="zh-CN" altLang="en-US" smtClean="0"/>
-              <a:t>2026/2/19</a:t>
+              <a:t>2026/2/20</a:t>
             </a:fld>
             <a:endParaRPr lang="zh-CN" altLang="en-US"/>
           </a:p>
@@ -3474,8 +3474,8 @@
         </p:nvSpPr>
         <p:spPr>
           <a:xfrm>
-            <a:off x="1839097" y="475883"/>
-            <a:ext cx="8492532" cy="10192117"/>
+            <a:off x="1839097" y="475884"/>
+            <a:ext cx="7882419" cy="5331359"/>
           </a:xfrm>
           <a:prstGeom prst="roundRect">
             <a:avLst>
@@ -3580,8 +3580,8 @@
         </p:nvSpPr>
         <p:spPr>
           <a:xfrm>
-            <a:off x="1876743" y="522120"/>
-            <a:ext cx="8440102" cy="10145880"/>
+            <a:off x="1876743" y="522121"/>
+            <a:ext cx="7844773" cy="5285122"/>
           </a:xfrm>
           <a:prstGeom prst="rect">
             <a:avLst/>
@@ -3926,305 +3926,39 @@
                 <a:ea typeface="Helvetica Neue" panose="02000503000000020004" pitchFamily="2" charset="0"/>
                 <a:cs typeface="Helvetica Neue" panose="02000503000000020004" pitchFamily="2" charset="0"/>
               </a:rPr>
-              <a:t>You must output ONLY a single valid JSON object on a single line, following this schema:</a:t>
-            </a:r>
-          </a:p>
-          <a:p>
+              <a:t>You must output ONLY a single valid JSON object on a single line, following this schema: &lt;</a:t>
+            </a:r>
             <a:r>
               <a:rPr lang="en-US" altLang="zh-CN" i="1" dirty="0">
                 <a:latin typeface="Helvetica" pitchFamily="2" charset="0"/>
                 <a:ea typeface="Helvetica Neue" panose="02000503000000020004" pitchFamily="2" charset="0"/>
                 <a:cs typeface="Helvetica Neue" panose="02000503000000020004" pitchFamily="2" charset="0"/>
               </a:rPr>
-              <a:t>{</a:t>
-            </a:r>
-          </a:p>
-          <a:p>
+              <a:t>JSON</a:t>
+            </a:r>
+            <a:r>
+              <a:rPr lang="en-US" altLang="zh-CN" dirty="0">
+                <a:latin typeface="Helvetica" pitchFamily="2" charset="0"/>
+                <a:ea typeface="Helvetica Neue" panose="02000503000000020004" pitchFamily="2" charset="0"/>
+                <a:cs typeface="Helvetica Neue" panose="02000503000000020004" pitchFamily="2" charset="0"/>
+              </a:rPr>
+              <a:t> </a:t>
+            </a:r>
             <a:r>
               <a:rPr lang="en-US" altLang="zh-CN" i="1" dirty="0">
                 <a:latin typeface="Helvetica" pitchFamily="2" charset="0"/>
                 <a:ea typeface="Helvetica Neue" panose="02000503000000020004" pitchFamily="2" charset="0"/>
                 <a:cs typeface="Helvetica Neue" panose="02000503000000020004" pitchFamily="2" charset="0"/>
               </a:rPr>
-              <a:t>	"metadata": {</a:t>
-            </a:r>
-          </a:p>
-          <a:p>
-            <a:r>
-              <a:rPr lang="en-US" altLang="zh-CN" i="1" dirty="0">
+              <a:t>SCHEMA</a:t>
+            </a:r>
+            <a:r>
+              <a:rPr lang="en-US" altLang="zh-CN" dirty="0">
                 <a:latin typeface="Helvetica" pitchFamily="2" charset="0"/>
                 <a:ea typeface="Helvetica Neue" panose="02000503000000020004" pitchFamily="2" charset="0"/>
                 <a:cs typeface="Helvetica Neue" panose="02000503000000020004" pitchFamily="2" charset="0"/>
               </a:rPr>
-              <a:t>			"name": "&lt;Name&gt;",</a:t>
-            </a:r>
-          </a:p>
-          <a:p>
-            <a:r>
-              <a:rPr lang="en-US" altLang="zh-CN" i="1" dirty="0">
-                <a:latin typeface="Helvetica" pitchFamily="2" charset="0"/>
-                <a:ea typeface="Helvetica Neue" panose="02000503000000020004" pitchFamily="2" charset="0"/>
-                <a:cs typeface="Helvetica Neue" panose="02000503000000020004" pitchFamily="2" charset="0"/>
-              </a:rPr>
-              <a:t>			"language": "Python",</a:t>
-            </a:r>
-          </a:p>
-          <a:p>
-            <a:r>
-              <a:rPr lang="en-US" altLang="zh-CN" i="1" dirty="0">
-                <a:latin typeface="Helvetica" pitchFamily="2" charset="0"/>
-                <a:ea typeface="Helvetica Neue" panose="02000503000000020004" pitchFamily="2" charset="0"/>
-                <a:cs typeface="Helvetica Neue" panose="02000503000000020004" pitchFamily="2" charset="0"/>
-              </a:rPr>
-              <a:t>			"description": "&lt;Desc&gt;”</a:t>
-            </a:r>
-          </a:p>
-          <a:p>
-            <a:r>
-              <a:rPr lang="en-US" altLang="zh-CN" i="1" dirty="0">
-                <a:latin typeface="Helvetica" pitchFamily="2" charset="0"/>
-                <a:ea typeface="Helvetica Neue" panose="02000503000000020004" pitchFamily="2" charset="0"/>
-                <a:cs typeface="Helvetica Neue" panose="02000503000000020004" pitchFamily="2" charset="0"/>
-              </a:rPr>
-              <a:t>	},</a:t>
-            </a:r>
-          </a:p>
-          <a:p>
-            <a:r>
-              <a:rPr lang="en-US" altLang="zh-CN" i="1" dirty="0">
-                <a:latin typeface="Helvetica" pitchFamily="2" charset="0"/>
-                <a:ea typeface="Helvetica Neue" panose="02000503000000020004" pitchFamily="2" charset="0"/>
-                <a:cs typeface="Helvetica Neue" panose="02000503000000020004" pitchFamily="2" charset="0"/>
-              </a:rPr>
-              <a:t>	"assets": {</a:t>
-            </a:r>
-          </a:p>
-          <a:p>
-            <a:r>
-              <a:rPr lang="en-US" altLang="zh-CN" i="1" dirty="0">
-                <a:latin typeface="Helvetica" pitchFamily="2" charset="0"/>
-                <a:ea typeface="Helvetica Neue" panose="02000503000000020004" pitchFamily="2" charset="0"/>
-                <a:cs typeface="Helvetica Neue" panose="02000503000000020004" pitchFamily="2" charset="0"/>
-              </a:rPr>
-              <a:t>			"</a:t>
-            </a:r>
-            <a:r>
-              <a:rPr lang="en-US" altLang="zh-CN" i="1" dirty="0" err="1">
-                <a:latin typeface="Helvetica" pitchFamily="2" charset="0"/>
-                <a:ea typeface="Helvetica Neue" panose="02000503000000020004" pitchFamily="2" charset="0"/>
-                <a:cs typeface="Helvetica Neue" panose="02000503000000020004" pitchFamily="2" charset="0"/>
-              </a:rPr>
-              <a:t>source_code</a:t>
-            </a:r>
-            <a:r>
-              <a:rPr lang="en-US" altLang="zh-CN" i="1" dirty="0">
-                <a:latin typeface="Helvetica" pitchFamily="2" charset="0"/>
-                <a:ea typeface="Helvetica Neue" panose="02000503000000020004" pitchFamily="2" charset="0"/>
-                <a:cs typeface="Helvetica Neue" panose="02000503000000020004" pitchFamily="2" charset="0"/>
-              </a:rPr>
-              <a:t>": [{"content":"&lt;full python code&gt;"}]},</a:t>
-            </a:r>
-          </a:p>
-          <a:p>
-            <a:r>
-              <a:rPr lang="en-US" altLang="zh-CN" i="1" dirty="0">
-                <a:latin typeface="Helvetica" pitchFamily="2" charset="0"/>
-                <a:ea typeface="Helvetica Neue" panose="02000503000000020004" pitchFamily="2" charset="0"/>
-                <a:cs typeface="Helvetica Neue" panose="02000503000000020004" pitchFamily="2" charset="0"/>
-              </a:rPr>
-              <a:t>			"dependencies": ["</a:t>
-            </a:r>
-            <a:r>
-              <a:rPr lang="en-US" altLang="zh-CN" i="1" dirty="0" err="1">
-                <a:latin typeface="Helvetica" pitchFamily="2" charset="0"/>
-                <a:ea typeface="Helvetica Neue" panose="02000503000000020004" pitchFamily="2" charset="0"/>
-                <a:cs typeface="Helvetica Neue" panose="02000503000000020004" pitchFamily="2" charset="0"/>
-              </a:rPr>
-              <a:t>mcp</a:t>
-            </a:r>
-            <a:r>
-              <a:rPr lang="en-US" altLang="zh-CN" i="1" dirty="0">
-                <a:latin typeface="Helvetica" pitchFamily="2" charset="0"/>
-                <a:ea typeface="Helvetica Neue" panose="02000503000000020004" pitchFamily="2" charset="0"/>
-                <a:cs typeface="Helvetica Neue" panose="02000503000000020004" pitchFamily="2" charset="0"/>
-              </a:rPr>
-              <a:t>", "</a:t>
-            </a:r>
-            <a:r>
-              <a:rPr lang="en-US" altLang="zh-CN" i="1" dirty="0" err="1">
-                <a:latin typeface="Helvetica" pitchFamily="2" charset="0"/>
-                <a:ea typeface="Helvetica Neue" panose="02000503000000020004" pitchFamily="2" charset="0"/>
-                <a:cs typeface="Helvetica Neue" panose="02000503000000020004" pitchFamily="2" charset="0"/>
-              </a:rPr>
-              <a:t>starlette</a:t>
-            </a:r>
-            <a:r>
-              <a:rPr lang="en-US" altLang="zh-CN" i="1" dirty="0">
-                <a:latin typeface="Helvetica" pitchFamily="2" charset="0"/>
-                <a:ea typeface="Helvetica Neue" panose="02000503000000020004" pitchFamily="2" charset="0"/>
-                <a:cs typeface="Helvetica Neue" panose="02000503000000020004" pitchFamily="2" charset="0"/>
-              </a:rPr>
-              <a:t>", "</a:t>
-            </a:r>
-            <a:r>
-              <a:rPr lang="en-US" altLang="zh-CN" i="1" dirty="0" err="1">
-                <a:latin typeface="Helvetica" pitchFamily="2" charset="0"/>
-                <a:ea typeface="Helvetica Neue" panose="02000503000000020004" pitchFamily="2" charset="0"/>
-                <a:cs typeface="Helvetica Neue" panose="02000503000000020004" pitchFamily="2" charset="0"/>
-              </a:rPr>
-              <a:t>uvicorn</a:t>
-            </a:r>
-            <a:r>
-              <a:rPr lang="en-US" altLang="zh-CN" i="1" dirty="0">
-                <a:latin typeface="Helvetica" pitchFamily="2" charset="0"/>
-                <a:ea typeface="Helvetica Neue" panose="02000503000000020004" pitchFamily="2" charset="0"/>
-                <a:cs typeface="Helvetica Neue" panose="02000503000000020004" pitchFamily="2" charset="0"/>
-              </a:rPr>
-              <a:t>", "&lt;</a:t>
-            </a:r>
-            <a:r>
-              <a:rPr lang="en-US" altLang="zh-CN" i="1" dirty="0" err="1">
-                <a:latin typeface="Helvetica" pitchFamily="2" charset="0"/>
-                <a:ea typeface="Helvetica Neue" panose="02000503000000020004" pitchFamily="2" charset="0"/>
-                <a:cs typeface="Helvetica Neue" panose="02000503000000020004" pitchFamily="2" charset="0"/>
-              </a:rPr>
-              <a:t>other_libs</a:t>
-            </a:r>
-            <a:r>
-              <a:rPr lang="en-US" altLang="zh-CN" i="1" dirty="0">
-                <a:latin typeface="Helvetica" pitchFamily="2" charset="0"/>
-                <a:ea typeface="Helvetica Neue" panose="02000503000000020004" pitchFamily="2" charset="0"/>
-                <a:cs typeface="Helvetica Neue" panose="02000503000000020004" pitchFamily="2" charset="0"/>
-              </a:rPr>
-              <a:t>&gt;"]</a:t>
-            </a:r>
-          </a:p>
-          <a:p>
-            <a:r>
-              <a:rPr lang="en-US" altLang="zh-CN" i="1" dirty="0">
-                <a:latin typeface="Helvetica" pitchFamily="2" charset="0"/>
-                <a:ea typeface="Helvetica Neue" panose="02000503000000020004" pitchFamily="2" charset="0"/>
-                <a:cs typeface="Helvetica Neue" panose="02000503000000020004" pitchFamily="2" charset="0"/>
-              </a:rPr>
-              <a:t>	},</a:t>
-            </a:r>
-          </a:p>
-          <a:p>
-            <a:r>
-              <a:rPr lang="en-US" altLang="zh-CN" i="1" dirty="0">
-                <a:latin typeface="Helvetica" pitchFamily="2" charset="0"/>
-                <a:ea typeface="Helvetica Neue" panose="02000503000000020004" pitchFamily="2" charset="0"/>
-                <a:cs typeface="Helvetica Neue" panose="02000503000000020004" pitchFamily="2" charset="0"/>
-              </a:rPr>
-              <a:t>	"</a:t>
-            </a:r>
-            <a:r>
-              <a:rPr lang="en-US" altLang="zh-CN" i="1" dirty="0" err="1">
-                <a:latin typeface="Helvetica" pitchFamily="2" charset="0"/>
-                <a:ea typeface="Helvetica Neue" panose="02000503000000020004" pitchFamily="2" charset="0"/>
-                <a:cs typeface="Helvetica Neue" panose="02000503000000020004" pitchFamily="2" charset="0"/>
-              </a:rPr>
-              <a:t>ground_truth</a:t>
-            </a:r>
-            <a:r>
-              <a:rPr lang="en-US" altLang="zh-CN" i="1" dirty="0">
-                <a:latin typeface="Helvetica" pitchFamily="2" charset="0"/>
-                <a:ea typeface="Helvetica Neue" panose="02000503000000020004" pitchFamily="2" charset="0"/>
-                <a:cs typeface="Helvetica Neue" panose="02000503000000020004" pitchFamily="2" charset="0"/>
-              </a:rPr>
-              <a:t>": {</a:t>
-            </a:r>
-          </a:p>
-          <a:p>
-            <a:r>
-              <a:rPr lang="en-US" altLang="zh-CN" i="1" dirty="0">
-                <a:latin typeface="Helvetica" pitchFamily="2" charset="0"/>
-                <a:ea typeface="Helvetica Neue" panose="02000503000000020004" pitchFamily="2" charset="0"/>
-                <a:cs typeface="Helvetica Neue" panose="02000503000000020004" pitchFamily="2" charset="0"/>
-              </a:rPr>
-              <a:t>				"</a:t>
-            </a:r>
-            <a:r>
-              <a:rPr lang="en-US" altLang="zh-CN" i="1" dirty="0" err="1">
-                <a:latin typeface="Helvetica" pitchFamily="2" charset="0"/>
-                <a:ea typeface="Helvetica Neue" panose="02000503000000020004" pitchFamily="2" charset="0"/>
-                <a:cs typeface="Helvetica Neue" panose="02000503000000020004" pitchFamily="2" charset="0"/>
-              </a:rPr>
-              <a:t>is_vulnerable</a:t>
-            </a:r>
-            <a:r>
-              <a:rPr lang="en-US" altLang="zh-CN" i="1" dirty="0">
-                <a:latin typeface="Helvetica" pitchFamily="2" charset="0"/>
-                <a:ea typeface="Helvetica Neue" panose="02000503000000020004" pitchFamily="2" charset="0"/>
-                <a:cs typeface="Helvetica Neue" panose="02000503000000020004" pitchFamily="2" charset="0"/>
-              </a:rPr>
-              <a:t>": true,</a:t>
-            </a:r>
-          </a:p>
-          <a:p>
-            <a:r>
-              <a:rPr lang="en-US" altLang="zh-CN" i="1" dirty="0">
-                <a:latin typeface="Helvetica" pitchFamily="2" charset="0"/>
-                <a:ea typeface="Helvetica Neue" panose="02000503000000020004" pitchFamily="2" charset="0"/>
-                <a:cs typeface="Helvetica Neue" panose="02000503000000020004" pitchFamily="2" charset="0"/>
-              </a:rPr>
-              <a:t>				"risks": [{</a:t>
-            </a:r>
-          </a:p>
-          <a:p>
-            <a:r>
-              <a:rPr lang="en-US" altLang="zh-CN" i="1" dirty="0">
-                <a:latin typeface="Helvetica" pitchFamily="2" charset="0"/>
-                <a:ea typeface="Helvetica Neue" panose="02000503000000020004" pitchFamily="2" charset="0"/>
-                <a:cs typeface="Helvetica Neue" panose="02000503000000020004" pitchFamily="2" charset="0"/>
-              </a:rPr>
-              <a:t>					”</a:t>
-            </a:r>
-            <a:r>
-              <a:rPr lang="en-US" altLang="zh-CN" i="1" dirty="0" err="1">
-                <a:latin typeface="Helvetica" pitchFamily="2" charset="0"/>
-                <a:ea typeface="Helvetica Neue" panose="02000503000000020004" pitchFamily="2" charset="0"/>
-                <a:cs typeface="Helvetica Neue" panose="02000503000000020004" pitchFamily="2" charset="0"/>
-              </a:rPr>
-              <a:t>vulnerability_type</a:t>
-            </a:r>
-            <a:r>
-              <a:rPr lang="en-US" altLang="zh-CN" i="1" dirty="0">
-                <a:latin typeface="Helvetica" pitchFamily="2" charset="0"/>
-                <a:ea typeface="Helvetica Neue" panose="02000503000000020004" pitchFamily="2" charset="0"/>
-                <a:cs typeface="Helvetica Neue" panose="02000503000000020004" pitchFamily="2" charset="0"/>
-              </a:rPr>
-              <a:t>": "{type}",</a:t>
-            </a:r>
-          </a:p>
-          <a:p>
-            <a:r>
-              <a:rPr lang="en-US" altLang="zh-CN" i="1" dirty="0">
-                <a:latin typeface="Helvetica" pitchFamily="2" charset="0"/>
-                <a:ea typeface="Helvetica Neue" panose="02000503000000020004" pitchFamily="2" charset="0"/>
-                <a:cs typeface="Helvetica Neue" panose="02000503000000020004" pitchFamily="2" charset="0"/>
-              </a:rPr>
-              <a:t>					"description": "&lt;desc&gt;"}</a:t>
-            </a:r>
-          </a:p>
-          <a:p>
-            <a:r>
-              <a:rPr lang="en-US" altLang="zh-CN" i="1" dirty="0">
-                <a:latin typeface="Helvetica" pitchFamily="2" charset="0"/>
-                <a:ea typeface="Helvetica Neue" panose="02000503000000020004" pitchFamily="2" charset="0"/>
-                <a:cs typeface="Helvetica Neue" panose="02000503000000020004" pitchFamily="2" charset="0"/>
-              </a:rPr>
-              <a:t>				]}</a:t>
-            </a:r>
-          </a:p>
-          <a:p>
-            <a:r>
-              <a:rPr lang="en-US" altLang="zh-CN" i="1" dirty="0">
-                <a:latin typeface="Helvetica" pitchFamily="2" charset="0"/>
-                <a:ea typeface="Helvetica Neue" panose="02000503000000020004" pitchFamily="2" charset="0"/>
-                <a:cs typeface="Helvetica Neue" panose="02000503000000020004" pitchFamily="2" charset="0"/>
-              </a:rPr>
-              <a:t>}}</a:t>
+              <a:t>&gt;</a:t>
             </a:r>
           </a:p>
           <a:p>
